--- a/04-Closing/PLAQUETTE-DEDIE-VS-NONSTOP.pptx
+++ b/04-Closing/PLAQUETTE-DEDIE-VS-NONSTOP.pptx
@@ -2081,7 +2081,7 @@
                 <a:ea typeface="Calibri" pitchFamily="34" charset="-122"/>
                 <a:cs typeface="Calibri" pitchFamily="34" charset="-120"/>
               </a:rPr>
-              <a:t>Il se joue sur l'amplitude que vous devez couvrir — et sur ce qui doit se passer quand quelqu'un manque.</a:t>
+              <a:t>Il se joue sur les heures où on vous sollicite — et sur ce qui doit se passer quand quelqu'un manque.</a:t>
             </a:r>
             <a:endParaRPr lang="en-US" sz="1500" dirty="0"/>
           </a:p>
@@ -2480,7 +2480,7 @@
                 <a:ea typeface="Calibri" pitchFamily="34" charset="-122"/>
                 <a:cs typeface="Calibri" pitchFamily="34" charset="-120"/>
               </a:rPr>
-              <a:t>Un agent 100 % à vous, 35 ou 40 h/semaine.</a:t>
+              <a:t>Un agent 100 % à vous, 35 ou 40 h/semaine, sur une plage classique.</a:t>
             </a:r>
             <a:endParaRPr lang="en-US" sz="1300" dirty="0"/>
           </a:p>
@@ -2646,7 +2646,7 @@
                 <a:ea typeface="Calibri" pitchFamily="34" charset="-122"/>
                 <a:cs typeface="Calibri" pitchFamily="34" charset="-120"/>
               </a:rPr>
-              <a:t>La contrepartie : votre couverture est bornée par les heures de présence de vos agents.</a:t>
+              <a:t>La contrepartie : passé 18h ou le week-end, personne ne répond avant le lendemain matin.</a:t>
             </a:r>
             <a:endParaRPr lang="en-US" sz="1200" dirty="0"/>
           </a:p>
@@ -2842,7 +2842,7 @@
                 <a:ea typeface="Calibri" pitchFamily="34" charset="-122"/>
                 <a:cs typeface="Calibri" pitchFamily="34" charset="-120"/>
               </a:rPr>
-              <a:t>4 agents minimum en rotation, plus un superviseur dédié.</a:t>
+              <a:t>4 agents minimum en rotation sur 6h-20h, 3×8 ou 24·7, plus un superviseur dédié.</a:t>
             </a:r>
             <a:endParaRPr lang="en-US" sz="1300" dirty="0"/>
           </a:p>
@@ -3008,7 +3008,7 @@
                 <a:ea typeface="Calibri" pitchFamily="34" charset="-122"/>
                 <a:cs typeface="Calibri" pitchFamily="34" charset="-120"/>
               </a:rPr>
-              <a:t>La contrepartie : la rotation se paie, même les jours où personne ne manque.</a:t>
+              <a:t>La contrepartie : la rotation se paie, même les heures où personne ne manque.</a:t>
             </a:r>
             <a:endParaRPr lang="en-US" sz="1200" dirty="0"/>
           </a:p>
@@ -3243,7 +3243,7 @@
                 <a:ea typeface="Calibri" pitchFamily="34" charset="-122"/>
                 <a:cs typeface="Calibri" pitchFamily="34" charset="-120"/>
               </a:rPr>
-              <a:t>Votre flux tient en 1 à 3 positions</a:t>
+              <a:t>Vos utilisateurs sont là de 9h à 18h</a:t>
             </a:r>
             <a:endParaRPr lang="en-US" sz="1400" dirty="0"/>
           </a:p>
@@ -3285,7 +3285,7 @@
                 <a:ea typeface="Calibri" pitchFamily="34" charset="-122"/>
                 <a:cs typeface="Calibri" pitchFamily="34" charset="-120"/>
               </a:rPr>
-              <a:t>Sous 4 agents, la rotation n'existe pas : le Non-stop n'est ni staffable ni tenable. Le sujet ne se pose même pas.</a:t>
+              <a:t>Pas après : c'est déjà la totalité de votre trafic. Payer une rotation nocturne pour zéro appel après 18h ne rembourse jamais son surcoût.</a:t>
             </a:r>
             <a:endParaRPr lang="en-US" sz="1150" dirty="0"/>
           </a:p>
@@ -3410,7 +3410,7 @@
                 <a:ea typeface="Calibri" pitchFamily="34" charset="-122"/>
                 <a:cs typeface="Calibri" pitchFamily="34" charset="-120"/>
               </a:rPr>
-              <a:t>Vos utilisateurs appellent en journée</a:t>
+              <a:t>Un ticket du soir attend le lendemain</a:t>
             </a:r>
             <a:endParaRPr lang="en-US" sz="1400" dirty="0"/>
           </a:p>
@@ -3452,7 +3452,7 @@
                 <a:ea typeface="Calibri" pitchFamily="34" charset="-122"/>
                 <a:cs typeface="Calibri" pitchFamily="34" charset="-120"/>
               </a:rPr>
-              <a:t>Une plage de ~45 h/semaine est exactement ce qu'un agent dédié couvre. Payer une rotation n'achèterait pas une minute de plus.</a:t>
+              <a:t>Nuit ou week-end sans réponse : le ticket part à l'ouverture, sans pénalité ni client qui décroche.</a:t>
             </a:r>
             <a:endParaRPr lang="en-US" sz="1150" dirty="0"/>
           </a:p>
@@ -3577,7 +3577,7 @@
                 <a:ea typeface="Calibri" pitchFamily="34" charset="-122"/>
                 <a:cs typeface="Calibri" pitchFamily="34" charset="-120"/>
               </a:rPr>
-              <a:t>Une absence n'arrête pas le service</a:t>
+              <a:t>Vous couvrez 1 à 3 positions</a:t>
             </a:r>
             <a:endParaRPr lang="en-US" sz="1400" dirty="0"/>
           </a:p>
@@ -3619,7 +3619,7 @@
                 <a:ea typeface="Calibri" pitchFamily="34" charset="-122"/>
                 <a:cs typeface="Calibri" pitchFamily="34" charset="-120"/>
               </a:rPr>
-              <a:t>Le manager métier reprend les absences ponctuelles. Vos tickets sont traités — un peu plus lentement le temps de l'absence.</a:t>
+              <a:t>Sous 4 agents, une rotation ne peut de toute façon pas tourner : le sujet Non-stop ne se pose même pas.</a:t>
             </a:r>
             <a:endParaRPr lang="en-US" sz="1150" dirty="0"/>
           </a:p>
@@ -3744,7 +3744,7 @@
                 <a:ea typeface="Calibri" pitchFamily="34" charset="-122"/>
                 <a:cs typeface="Calibri" pitchFamily="34" charset="-120"/>
               </a:rPr>
-              <a:t>Vous voulez le même interlocuteur</a:t>
+              <a:t>Une absence glisse le traitement</a:t>
             </a:r>
             <a:endParaRPr lang="en-US" sz="1400" dirty="0"/>
           </a:p>
@@ -3786,7 +3786,7 @@
                 <a:ea typeface="Calibri" pitchFamily="34" charset="-122"/>
                 <a:cs typeface="Calibri" pitchFamily="34" charset="-120"/>
               </a:rPr>
-              <a:t>Un agent nominatif finit par connaître votre parc mieux que vos nouveaux arrivants. Une rotation dilue mécaniquement cette connaissance.</a:t>
+              <a:t>de quelques heures dans la journée, pas d'un jour : le manager métier reprend, le ticket part juste un peu plus tard.</a:t>
             </a:r>
             <a:endParaRPr lang="en-US" sz="1150" dirty="0"/>
           </a:p>
@@ -3953,7 +3953,7 @@
                 <a:ea typeface="Calibri" pitchFamily="34" charset="-122"/>
                 <a:cs typeface="Calibri" pitchFamily="34" charset="-120"/>
               </a:rPr>
-              <a:t>C'est le forfait qui porte l'écart de −40 à −60 % face à un poste interne en France. Le Non-stop, lui, s'achète pour une garantie.</a:t>
+              <a:t>sur une plage classique : c'est le forfait qui porte l'écart de −40 à −60 % face à un poste interne en France.</a:t>
             </a:r>
             <a:endParaRPr lang="en-US" sz="1150" dirty="0"/>
           </a:p>
@@ -4056,7 +4056,7 @@
                 <a:ea typeface="Calibri" pitchFamily="34" charset="-122"/>
                 <a:cs typeface="Calibri" pitchFamily="34" charset="-120"/>
               </a:rPr>
-              <a:t>par mois pour 4 agents en heures de bureau, soit 1 425 € de moins que le même effectif en Non-stop.</a:t>
+              <a:t>par mois pour 4 agents sur 9h–18h, soit 1 425 € de moins que le même effectif en Non-stop.</a:t>
             </a:r>
             <a:endParaRPr lang="en-US" sz="1100" dirty="0"/>
           </a:p>
@@ -4095,7 +4095,7 @@
                 <a:ea typeface="Calibri" pitchFamily="34" charset="-122"/>
                 <a:cs typeface="Calibri" pitchFamily="34" charset="-120"/>
               </a:rPr>
-              <a:t>Dans ces cinq cas, monter au Non-stop revient à payer une garantie dont votre besoin n'a pas l'usage — et nous vous le dirons.</a:t>
+              <a:t>Dans ces cinq cas, monter au Non-stop revient à payer une garantie dont vos horaires n'ont pas l'usage — et nous vous le dirons.</a:t>
             </a:r>
             <a:endParaRPr lang="en-US" sz="1200" dirty="0"/>
           </a:p>
@@ -4330,7 +4330,7 @@
                 <a:ea typeface="Calibri" pitchFamily="34" charset="-122"/>
                 <a:cs typeface="Calibri" pitchFamily="34" charset="-120"/>
               </a:rPr>
-              <a:t>Votre plage dépasse la journée</a:t>
+              <a:t>Des demandes arrivent après 18h</a:t>
             </a:r>
             <a:endParaRPr lang="en-US" sz="1400" dirty="0"/>
           </a:p>
@@ -4372,7 +4372,7 @@
                 <a:ea typeface="Calibri" pitchFamily="34" charset="-122"/>
                 <a:cs typeface="Calibri" pitchFamily="34" charset="-120"/>
               </a:rPr>
-              <a:t>6h-20h, soirée, ou 3×8. Au-delà de ~45 h/semaine, un agent dédié ne suffit plus : il faut 1,33 tête par position pour tenir 8h-20h.</a:t>
+              <a:t>le week-end ou la nuit. Hors 9h–18h, un poste dédié ne répond pas : il faut quelqu'un en poste, physiquement, sur ces heures-là.</a:t>
             </a:r>
             <a:endParaRPr lang="en-US" sz="1150" dirty="0"/>
           </a:p>
@@ -4497,7 +4497,7 @@
                 <a:ea typeface="Calibri" pitchFamily="34" charset="-122"/>
                 <a:cs typeface="Calibri" pitchFamily="34" charset="-120"/>
               </a:rPr>
-              <a:t>Vous portez un SLA opposable</a:t>
+              <a:t>Vendredi 19h ne peut pas attendre lundi 9h</a:t>
             </a:r>
             <a:endParaRPr lang="en-US" sz="1400" dirty="0"/>
           </a:p>
@@ -4539,7 +4539,7 @@
                 <a:ea typeface="Calibri" pitchFamily="34" charset="-122"/>
                 <a:cs typeface="Calibri" pitchFamily="34" charset="-120"/>
               </a:rPr>
-              <a:t>Si un délai de première réponse est écrit dans votre contrat client, « le manager reprendra » n'est pas une réponse suffisante.</a:t>
+              <a:t>62 heures de silence, ce n'est pas un délai : c'est une rupture. Un ticket dédié attend l'ouverture ; un ticket Non-stop est pris en charge dans l'heure.</a:t>
             </a:r>
             <a:endParaRPr lang="en-US" sz="1150" dirty="0"/>
           </a:p>
@@ -4664,7 +4664,7 @@
                 <a:ea typeface="Calibri" pitchFamily="34" charset="-122"/>
                 <a:cs typeface="Calibri" pitchFamily="34" charset="-120"/>
               </a:rPr>
-              <a:t>Une demi-journée sans réponse coûte cher</a:t>
+              <a:t>Chaque heure sans réponse coûte cher</a:t>
             </a:r>
             <a:endParaRPr lang="en-US" sz="1400" dirty="0"/>
           </a:p>
@@ -4706,7 +4706,7 @@
                 <a:ea typeface="Calibri" pitchFamily="34" charset="-122"/>
                 <a:cs typeface="Calibri" pitchFamily="34" charset="-120"/>
               </a:rPr>
-              <a:t>Pénalité contractuelle, escalade client, appel d'offres à défendre : quand la rupture se chiffre, la rotation devient l'option économique.</a:t>
+              <a:t>Pénalité de SLA, escalade client, appel d'offres à défendre : dès qu'une heure se facture, la rotation devient l'option économique.</a:t>
             </a:r>
             <a:endParaRPr lang="en-US" sz="1150" dirty="0"/>
           </a:p>
@@ -4831,7 +4831,7 @@
                 <a:ea typeface="Calibri" pitchFamily="34" charset="-122"/>
                 <a:cs typeface="Calibri" pitchFamily="34" charset="-120"/>
               </a:rPr>
-              <a:t>Vous avez 4 positions ou plus</a:t>
+              <a:t>Votre couverture dépasse 45 h/semaine</a:t>
             </a:r>
             <a:endParaRPr lang="en-US" sz="1400" dirty="0"/>
           </a:p>
@@ -4873,7 +4873,7 @@
                 <a:ea typeface="Calibri" pitchFamily="34" charset="-122"/>
                 <a:cs typeface="Calibri" pitchFamily="34" charset="-120"/>
               </a:rPr>
-              <a:t>C'est le plancher de staffing : 4 × 35 h = 140 h/semaine pour 70 h d'amplitude. Un absent laisse encore 105 h de couverture.</a:t>
+              <a:t>6h-20h, 3×8 ou 24·7 : au-delà d'une journée de travail, il faut des équipes qui se relaient, pas des agents qui s'épuisent.</a:t>
             </a:r>
             <a:endParaRPr lang="en-US" sz="1150" dirty="0"/>
           </a:p>
@@ -4998,7 +4998,7 @@
                 <a:ea typeface="Calibri" pitchFamily="34" charset="-122"/>
                 <a:cs typeface="Calibri" pitchFamily="34" charset="-120"/>
               </a:rPr>
-              <a:t>Vous voulez un superviseur dédié</a:t>
+              <a:t>Vous ouvrez 4 positions ou plus</a:t>
             </a:r>
             <a:endParaRPr lang="en-US" sz="1400" dirty="0"/>
           </a:p>
@@ -5040,7 +5040,7 @@
                 <a:ea typeface="Calibri" pitchFamily="34" charset="-122"/>
                 <a:cs typeface="Calibri" pitchFamily="34" charset="-120"/>
               </a:rPr>
-              <a:t>Un interlocuteur qui pilote la file, arbitre les priorités et rend compte — pas seulement des agents qui traitent des tickets.</a:t>
+              <a:t>C'est le plancher physique de la rotation : 4 × 35 h = 140 h/semaine pour 70 h d'amplitude. En dessous, elle ne tourne pas.</a:t>
             </a:r>
             <a:endParaRPr lang="en-US" sz="1150" dirty="0"/>
           </a:p>
@@ -5182,7 +5182,7 @@
                 <a:ea typeface="Calibri" pitchFamily="34" charset="-122"/>
                 <a:cs typeface="Calibri" pitchFamily="34" charset="-120"/>
               </a:rPr>
-              <a:t>Un seul de ces cinq critères suffit à justifier le Non-stop — sauf le plancher de 4 positions, qui, lui, est non négociable.</a:t>
+              <a:t>Un seul de ces cinq critères suffit à justifier le Non-stop, dès lors qu'il touche les heures — sauf le plancher de 4 positions, qui, lui, est non négociable.</a:t>
             </a:r>
             <a:endParaRPr lang="en-US" sz="1200" dirty="0"/>
           </a:p>
@@ -5285,7 +5285,7 @@
                 <a:ea typeface="Cambria" pitchFamily="34" charset="-122"/>
                 <a:cs typeface="Cambria" pitchFamily="34" charset="-120"/>
               </a:rPr>
-              <a:t>L'amplitude décide, pas le volume</a:t>
+              <a:t>Les heures décident, pas le volume</a:t>
             </a:r>
             <a:endParaRPr lang="en-US" sz="3200" dirty="0"/>
           </a:p>
@@ -5324,7 +5324,7 @@
                 <a:ea typeface="Calibri" pitchFamily="34" charset="-122"/>
                 <a:cs typeface="Calibri" pitchFamily="34" charset="-120"/>
               </a:rPr>
-              <a:t>À effectif identique — 4 agents — le forfait le moins cher change selon la plage à couvrir. C'est le seul arbitrage qui compte.</a:t>
+              <a:t>À effectif identique — 4 agents — le forfait le moins cher change selon les heures à couvrir, de 9h–18h à 8h–20h. C'est le seul arbitrage qui compte.</a:t>
             </a:r>
             <a:endParaRPr lang="en-US" sz="1500" dirty="0"/>
           </a:p>
@@ -5409,7 +5409,7 @@
                 <a:ea typeface="Calibri" pitchFamily="34" charset="-122"/>
                 <a:cs typeface="Calibri" pitchFamily="34" charset="-120"/>
               </a:rPr>
-              <a:t>Aux heures de bureau, le dédié gagne</a:t>
+              <a:t>De 9h à 18h, le dédié gagne</a:t>
             </a:r>
             <a:endParaRPr lang="en-US" sz="1300" dirty="0"/>
           </a:p>
@@ -5451,7 +5451,7 @@
                 <a:ea typeface="Calibri" pitchFamily="34" charset="-122"/>
                 <a:cs typeface="Calibri" pitchFamily="34" charset="-120"/>
               </a:rPr>
-              <a:t>La rotation et le superviseur du Non-stop coûtent +15 % sans couvrir une minute de plus. Le surcoût n'achète pas du temps : il achète la garantie que la plage tienne.</a:t>
+              <a:t>La rotation et le superviseur du Non-stop coûtent +15 % sans couvrir une minute de plus, tant que personne ne sollicite le support hors de ces heures. Le surcoût n'achète pas du temps : il achète une garantie.</a:t>
             </a:r>
             <a:endParaRPr lang="en-US" sz="1050" dirty="0"/>
           </a:p>
@@ -5520,7 +5520,7 @@
                 <a:ea typeface="Calibri" pitchFamily="34" charset="-122"/>
                 <a:cs typeface="Calibri" pitchFamily="34" charset="-120"/>
               </a:rPr>
-              <a:t>En 8h-20h, le Non-stop repasse devant</a:t>
+              <a:t>Dès 8h-20h, le Non-stop repasse devant</a:t>
             </a:r>
             <a:endParaRPr lang="en-US" sz="1300" dirty="0"/>
           </a:p>
@@ -5562,7 +5562,7 @@
                 <a:ea typeface="Calibri" pitchFamily="34" charset="-122"/>
                 <a:cs typeface="Calibri" pitchFamily="34" charset="-120"/>
               </a:rPr>
-              <a:t>Tenir 60 h/semaine en Poste dédié demande 1,33 tête par position, soit 5,3 personnes pour 4 postes. L'amplitude coûte des personnes, pas un pourcentage.</a:t>
+              <a:t>Tenir 60 h/semaine en Poste dédié demande 1,33 tête par position, soit 5,3 personnes pour 4 postes. Chaque heure de plus à couvrir coûte une tête, pas un pourcentage.</a:t>
             </a:r>
             <a:endParaRPr lang="en-US" sz="1050" dirty="0"/>
           </a:p>
@@ -7629,7 +7629,7 @@
                 <a:ea typeface="Calibri" pitchFamily="34" charset="-122"/>
                 <a:cs typeface="Calibri" pitchFamily="34" charset="-120"/>
               </a:rPr>
-              <a:t>Tant que votre besoin tient dans une journée de travail, le Poste dédié le couvre au meilleur prix. Dès que la plage à tenir dépasse une journée — et que vous avez 4 positions à ouvrir — le Non-stop la tient pour moins cher que des postes dédiés empilés.</a:t>
+              <a:t>Tant que vos demandes arrivent entre 9h et 18h, le Poste dédié les couvre au meilleur prix. Dès qu'elles arrivent après 18h, le week-end ou la nuit — et que vous avez 4 positions à ouvrir — le Non-stop les couvre pour moins cher que des postes dédiés empilés.</a:t>
             </a:r>
             <a:endParaRPr lang="en-US" sz="1500" dirty="0"/>
           </a:p>
@@ -7749,7 +7749,7 @@
                 <a:ea typeface="Calibri" pitchFamily="34" charset="-122"/>
                 <a:cs typeface="Calibri" pitchFamily="34" charset="-120"/>
               </a:rPr>
-              <a:t>Vous décrivez votre plage</a:t>
+              <a:t>Vous décrivez vos horaires</a:t>
             </a:r>
             <a:endParaRPr lang="en-US" sz="1350" dirty="0"/>
           </a:p>
@@ -7791,7 +7791,7 @@
                 <a:ea typeface="Calibri" pitchFamily="34" charset="-122"/>
                 <a:cs typeface="Calibri" pitchFamily="34" charset="-120"/>
               </a:rPr>
-              <a:t>Amplitude à couvrir, volume, SLA en vigueur, et ce qui se passe aujourd'hui quand personne ne répond.</a:t>
+              <a:t>Heures à couvrir, volume, SLA en vigueur, et ce qui se passe aujourd'hui quand un ticket arrive hors plage.</a:t>
             </a:r>
             <a:endParaRPr lang="en-US" sz="1050" dirty="0"/>
           </a:p>

--- a/04-Closing/PLAQUETTE-DEDIE-VS-NONSTOP.pptx
+++ b/04-Closing/PLAQUETTE-DEDIE-VS-NONSTOP.pptx
@@ -243,7 +243,7 @@
               <c:strCache>
                 <c:ptCount val="1"/>
                 <c:pt idx="0">
-                  <c:v>Non-stop</c:v>
+                  <c:v>Équipe managée</c:v>
                 </c:pt>
               </c:strCache>
             </c:strRef>
@@ -875,7 +875,7 @@
           <a:p>
             <a:r>
               <a:rPr lang="en-US" dirty="0"/>
-              <a:t>Plaquette d'aide au choix entre le forfait Poste dédié et le forfait Non-stop. À utiliser en rendez-vous quand le prospect hésite entre les deux, ou quand il demande le Non-stop alors que son besoin ne le justifie pas.</a:t>
+              <a:t>Plaquette d'aide au choix entre le forfait Poste dédié et le forfait Équipe managée. À utiliser en rendez-vous quand le prospect hésite entre les deux, ou quand il demande l'Équipe managée alors que son besoin ne le justifie pas.</a:t>
             </a:r>
             <a:endParaRPr lang="en-US" dirty="0"/>
           </a:p>
@@ -1051,7 +1051,7 @@
           <a:p>
             <a:r>
               <a:rPr lang="en-US" dirty="0"/>
-              <a:t>À utiliser quand le prospect demande spontanément le Non-stop : lui montrer qu'il paierait une garantie dont son besoin n'a pas l'usage.</a:t>
+              <a:t>À utiliser quand le prospect demande spontanément l'Équipe managée : lui montrer qu'il paierait une garantie dont son besoin n'a pas l'usage.</a:t>
             </a:r>
             <a:endParaRPr lang="en-US" dirty="0"/>
           </a:p>
@@ -1139,7 +1139,7 @@
           <a:p>
             <a:r>
               <a:rPr lang="en-US" dirty="0"/>
-              <a:t>Le 4e critère est le verrou : sous 4 positions, on ne vend pas le Non-stop, même si le client le demande. Ce n'est pas un choix commercial, c'est une contrainte de staffing.</a:t>
+              <a:t>Le 4e critère est le verrou : sous 4 positions, on ne vend pas l'Équipe managée, même si le client le demande. Ce n'est pas un choix commercial, c'est une contrainte de staffing.</a:t>
             </a:r>
             <a:endParaRPr lang="en-US" dirty="0"/>
           </a:p>
@@ -1227,7 +1227,7 @@
           <a:p>
             <a:r>
               <a:rPr lang="en-US" dirty="0"/>
-              <a:t>Chiffres issus du simulateur public (PRICING.md §3.f). Le Non-stop à 4 agents (10 925 €) correspond au « à partir de 11 000 € » affiché sur le site.</a:t>
+              <a:t>Chiffres issus du simulateur public (PRICING.md §3.f). L'Équipe managée à 4 agents (10 925 €) correspond au « à partir de 11 000 € » affiché sur le site.</a:t>
             </a:r>
             <a:endParaRPr lang="en-US" dirty="0"/>
           </a:p>
@@ -1980,7 +1980,7 @@
                 <a:ea typeface="Cambria" pitchFamily="34" charset="-122"/>
                 <a:cs typeface="Cambria" pitchFamily="34" charset="-120"/>
               </a:rPr>
-              <a:t>Poste dédié ou Non-stop ?</a:t>
+              <a:t>Poste dédié ou Équipe managée ?</a:t>
             </a:r>
             <a:endParaRPr lang="en-US" sz="4400" dirty="0"/>
           </a:p>
@@ -2741,7 +2741,7 @@
                 <a:ea typeface="Calibri" pitchFamily="34" charset="-122"/>
                 <a:cs typeface="Calibri" pitchFamily="34" charset="-120"/>
               </a:rPr>
-              <a:t>Non-stop</a:t>
+              <a:t>Équipe managée</a:t>
             </a:r>
             <a:endParaRPr lang="en-US" sz="1300" dirty="0"/>
           </a:p>
@@ -3619,7 +3619,7 @@
                 <a:ea typeface="Calibri" pitchFamily="34" charset="-122"/>
                 <a:cs typeface="Calibri" pitchFamily="34" charset="-120"/>
               </a:rPr>
-              <a:t>Sous 4 agents, une rotation ne peut de toute façon pas tourner : le sujet Non-stop ne se pose même pas.</a:t>
+              <a:t>Sous 4 agents, une rotation ne peut de toute façon pas tourner : le sujet Équipe managée ne se pose même pas.</a:t>
             </a:r>
             <a:endParaRPr lang="en-US" sz="1150" dirty="0"/>
           </a:p>
@@ -4056,7 +4056,7 @@
                 <a:ea typeface="Calibri" pitchFamily="34" charset="-122"/>
                 <a:cs typeface="Calibri" pitchFamily="34" charset="-120"/>
               </a:rPr>
-              <a:t>par mois pour 4 agents sur 9h–18h, soit 1 425 € de moins que le même effectif en Non-stop.</a:t>
+              <a:t>par mois pour 4 agents sur 9h–18h, soit 1 425 € de moins que le même effectif en Équipe managée.</a:t>
             </a:r>
             <a:endParaRPr lang="en-US" sz="1100" dirty="0"/>
           </a:p>
@@ -4095,7 +4095,7 @@
                 <a:ea typeface="Calibri" pitchFamily="34" charset="-122"/>
                 <a:cs typeface="Calibri" pitchFamily="34" charset="-120"/>
               </a:rPr>
-              <a:t>Dans ces cinq cas, monter au Non-stop revient à payer une garantie dont vos horaires n'ont pas l'usage — et nous vous le dirons.</a:t>
+              <a:t>Dans ces cinq cas, monter à l'Équipe managée revient à payer une garantie dont vos horaires n'ont pas l'usage — et nous vous le dirons.</a:t>
             </a:r>
             <a:endParaRPr lang="en-US" sz="1200" dirty="0"/>
           </a:p>
@@ -4205,7 +4205,7 @@
                 <a:ea typeface="Cambria" pitchFamily="34" charset="-122"/>
                 <a:cs typeface="Cambria" pitchFamily="34" charset="-120"/>
               </a:rPr>
-              <a:t>Passez au Non-stop si…</a:t>
+              <a:t>Passez à l'Équipe managée si…</a:t>
             </a:r>
             <a:endParaRPr lang="en-US" sz="3200" dirty="0"/>
           </a:p>
@@ -4539,7 +4539,7 @@
                 <a:ea typeface="Calibri" pitchFamily="34" charset="-122"/>
                 <a:cs typeface="Calibri" pitchFamily="34" charset="-120"/>
               </a:rPr>
-              <a:t>62 heures de silence, ce n'est pas un délai : c'est une rupture. Un ticket dédié attend l'ouverture ; un ticket Non-stop est pris en charge dans l'heure.</a:t>
+              <a:t>62 heures de silence, ce n'est pas un délai : c'est une rupture. Un ticket dédié attend l'ouverture ; un ticket en Équipe managée est pris en charge dans l'heure.</a:t>
             </a:r>
             <a:endParaRPr lang="en-US" sz="1150" dirty="0"/>
           </a:p>
@@ -5182,7 +5182,7 @@
                 <a:ea typeface="Calibri" pitchFamily="34" charset="-122"/>
                 <a:cs typeface="Calibri" pitchFamily="34" charset="-120"/>
               </a:rPr>
-              <a:t>Un seul de ces cinq critères suffit à justifier le Non-stop, dès lors qu'il touche les heures — sauf le plancher de 4 positions, qui, lui, est non négociable.</a:t>
+              <a:t>Un seul de ces cinq critères suffit à justifier l'Équipe managée, dès lors qu'il touche les heures — sauf le plancher de 4 positions, qui, lui, est non négociable.</a:t>
             </a:r>
             <a:endParaRPr lang="en-US" sz="1200" dirty="0"/>
           </a:p>
@@ -5451,7 +5451,7 @@
                 <a:ea typeface="Calibri" pitchFamily="34" charset="-122"/>
                 <a:cs typeface="Calibri" pitchFamily="34" charset="-120"/>
               </a:rPr>
-              <a:t>La rotation et le superviseur du Non-stop coûtent +15 % sans couvrir une minute de plus, tant que personne ne sollicite le support hors de ces heures. Le surcoût n'achète pas du temps : il achète une garantie.</a:t>
+              <a:t>La rotation et le superviseur de l'Équipe managée coûtent +15 % sans couvrir une minute de plus, tant que personne ne sollicite le support hors de ces heures. Le surcoût n'achète pas du temps : il achète une garantie.</a:t>
             </a:r>
             <a:endParaRPr lang="en-US" sz="1050" dirty="0"/>
           </a:p>
@@ -5520,7 +5520,7 @@
                 <a:ea typeface="Calibri" pitchFamily="34" charset="-122"/>
                 <a:cs typeface="Calibri" pitchFamily="34" charset="-120"/>
               </a:rPr>
-              <a:t>Dès 8h-20h, le Non-stop repasse devant</a:t>
+              <a:t>Dès 8h-20h, la comparaison change</a:t>
             </a:r>
             <a:endParaRPr lang="en-US" sz="1300" dirty="0"/>
           </a:p>
@@ -5562,7 +5562,7 @@
                 <a:ea typeface="Calibri" pitchFamily="34" charset="-122"/>
                 <a:cs typeface="Calibri" pitchFamily="34" charset="-120"/>
               </a:rPr>
-              <a:t>Tenir 60 h/semaine en Poste dédié demande 1,33 tête par position, soit 5,3 personnes pour 4 postes. Chaque heure de plus à couvrir coûte une tête, pas un pourcentage.</a:t>
+              <a:t>Tenir 60 h/semaine avec 4 positions en simultané demande 5,3 têtes en dédié. L'Équipe managée couvre la même plage avec 4 agents — donc ~2,3 en ligne à la fois. Moins cher pour cette raison, pas par efficacité.</a:t>
             </a:r>
             <a:endParaRPr lang="en-US" sz="1050" dirty="0"/>
           </a:p>
@@ -6215,7 +6215,7 @@
                 <a:ea typeface="Calibri" pitchFamily="34" charset="-122"/>
                 <a:cs typeface="Calibri" pitchFamily="34" charset="-120"/>
               </a:rPr>
-              <a:t>Non-stop</a:t>
+              <a:t>Équipe managée</a:t>
             </a:r>
             <a:endParaRPr lang="en-US" sz="1200" dirty="0"/>
           </a:p>
@@ -6299,7 +6299,7 @@
                 <a:ea typeface="Calibri" pitchFamily="34" charset="-122"/>
                 <a:cs typeface="Calibri" pitchFamily="34" charset="-120"/>
               </a:rPr>
-              <a:t>La plage horaire reste tenue : 4 × 35 h couvrent 70 h d'amplitude, un absent en laisse 105.</a:t>
+              <a:t>La plage reste tenue : 4 × 35 h couvrent 70 h d'amplitude, un absent en laisse 105.</a:t>
             </a:r>
             <a:endParaRPr lang="en-US" sz="1150" dirty="0"/>
           </a:p>
@@ -6341,7 +6341,7 @@
                 <a:ea typeface="Calibri" pitchFamily="34" charset="-122"/>
                 <a:cs typeface="Calibri" pitchFamily="34" charset="-120"/>
               </a:rPr>
-              <a:t>La capacité à l'identique — elle baisse d'environ 25 % le temps de l'absence.</a:t>
+              <a:t>Le nombre d'agents en ligne à la fois : ~2,3 sur 8h-20h, et environ 25 % de moins pendant l'absence.</a:t>
             </a:r>
             <a:endParaRPr lang="en-US" sz="1150" dirty="0"/>
           </a:p>
@@ -6846,7 +6846,7 @@
                 <a:ea typeface="Cambria" pitchFamily="34" charset="-122"/>
                 <a:cs typeface="Cambria" pitchFamily="34" charset="-120"/>
               </a:rPr>
-              <a:t>Prendre le Non-stop « pour être tranquille »</a:t>
+              <a:t>Prendre l'Équipe managée « pour être tranquille »</a:t>
             </a:r>
             <a:endParaRPr lang="en-US" sz="1600" dirty="0"/>
           </a:p>
@@ -7369,7 +7369,7 @@
                 <a:ea typeface="Calibri" pitchFamily="34" charset="-122"/>
                 <a:cs typeface="Calibri" pitchFamily="34" charset="-120"/>
               </a:rPr>
-              <a:t>Il faut 5,3 têtes pour 4 positions — plus cher que le Non-stop — et la plage tombe dès la première absence, précisément le jour où le SLA se joue.</a:t>
+              <a:t>Il faut 5,3 têtes pour tenir 4 positions en simultané — et la plage tombe dès la première absence, précisément le jour où le SLA se joue.</a:t>
             </a:r>
             <a:endParaRPr lang="en-US" sz="1200" dirty="0"/>
           </a:p>
@@ -7433,7 +7433,7 @@
                 <a:ea typeface="Calibri" pitchFamily="34" charset="-122"/>
                 <a:cs typeface="Calibri" pitchFamily="34" charset="-120"/>
               </a:rPr>
-              <a:t>Le bon réflexe : passer au Non-stop dès que la plage dépasse une journée de travail.</a:t>
+              <a:t>Le bon réflexe : passer à l'Équipe managée dès que la plage dépasse une journée de travail.</a:t>
             </a:r>
             <a:endParaRPr lang="en-US" sz="1150" dirty="0"/>
           </a:p>
@@ -7629,7 +7629,7 @@
                 <a:ea typeface="Calibri" pitchFamily="34" charset="-122"/>
                 <a:cs typeface="Calibri" pitchFamily="34" charset="-120"/>
               </a:rPr>
-              <a:t>Tant que vos demandes arrivent entre 9h et 18h, le Poste dédié les couvre au meilleur prix. Dès qu'elles arrivent après 18h, le week-end ou la nuit — et que vous avez 4 positions à ouvrir — le Non-stop les couvre pour moins cher que des postes dédiés empilés.</a:t>
+              <a:t>Tant que vos demandes arrivent entre 9h et 18h, le Poste dédié les couvre au meilleur prix. Dès qu'elles arrivent après 18h, le week-end ou la nuit — et que vous avez 4 positions à ouvrir — l'Équipe managée les couvre pour moins cher que des postes dédiés empilés.</a:t>
             </a:r>
             <a:endParaRPr lang="en-US" sz="1500" dirty="0"/>
           </a:p>
@@ -7953,7 +7953,7 @@
                 <a:ea typeface="Calibri" pitchFamily="34" charset="-122"/>
                 <a:cs typeface="Calibri" pitchFamily="34" charset="-120"/>
               </a:rPr>
-              <a:t>Poste dédié et Non-stop côte à côte, sur vos chiffres — y compris quand la réponse est de rester au dédié.</a:t>
+              <a:t>Poste dédié et Équipe managée côte à côte, sur vos chiffres — y compris quand la réponse est de rester au dédié.</a:t>
             </a:r>
             <a:endParaRPr lang="en-US" sz="1050" dirty="0"/>
           </a:p>

--- a/04-Closing/PLAQUETTE-DEDIE-VS-NONSTOP.pptx
+++ b/04-Closing/PLAQUETTE-DEDIE-VS-NONSTOP.pptx
@@ -1315,7 +1315,7 @@
           <a:p>
             <a:r>
               <a:rPr lang="en-US" dirty="0"/>
-              <a:t>Répond à l'objection « et si votre agent est malade ? ». Les trois promesses sont distinctes et toutes tenables — ne jamais promettre la capacité inchangée hors Priority.</a:t>
+              <a:t>Répond à l'objection « et si votre agent est malade ? ». Les deux promesses sont distinctes et toutes deux tenables — ne jamais promettre une capacité inchangée pendant l'absence.</a:t>
             </a:r>
             <a:endParaRPr lang="en-US" dirty="0"/>
           </a:p>
@@ -6349,228 +6349,7 @@
       </p:sp>
       <p:sp>
         <p:nvSpPr>
-          <p:cNvPr id="21" name="Shape 19"/>
-          <p:cNvSpPr/>
-          <p:nvPr/>
-        </p:nvSpPr>
-        <p:spPr>
-          <a:xfrm>
-            <a:off x="640080" y="4928616"/>
-            <a:ext cx="10881360" cy="1078992"/>
-          </a:xfrm>
-          <a:prstGeom prst="roundRect">
-            <a:avLst>
-              <a:gd name="adj" fmla="val 10169"/>
-            </a:avLst>
-          </a:prstGeom>
-          <a:solidFill>
-            <a:srgbClr val="FFFFFF"/>
-          </a:solidFill>
-          <a:ln w="12700">
-            <a:solidFill>
-              <a:srgbClr val="DCE3E6"/>
-            </a:solidFill>
-            <a:prstDash val="solid"/>
-          </a:ln>
-          <a:effectLst>
-            <a:outerShdw sx="100000" sy="100000" kx="0" ky="0" algn="bl" rotWithShape="0" blurRad="152400" dist="38100" dir="5400000">
-              <a:srgbClr val="0E3D4E">
-                <a:alpha val="10000"/>
-              </a:srgbClr>
-            </a:outerShdw>
-          </a:effectLst>
-        </p:spPr>
-      </p:sp>
-      <p:sp>
-        <p:nvSpPr>
-          <p:cNvPr id="22" name="Shape 20"/>
-          <p:cNvSpPr/>
-          <p:nvPr/>
-        </p:nvSpPr>
-        <p:spPr>
-          <a:xfrm>
-            <a:off x="868680" y="5276088"/>
-            <a:ext cx="1325880" cy="384048"/>
-          </a:xfrm>
-          <a:prstGeom prst="roundRect">
-            <a:avLst>
-              <a:gd name="adj" fmla="val 50000"/>
-            </a:avLst>
-          </a:prstGeom>
-          <a:solidFill>
-            <a:srgbClr val="7A8B94"/>
-          </a:solidFill>
-          <a:ln/>
-        </p:spPr>
-      </p:sp>
-      <p:sp>
-        <p:nvSpPr>
-          <p:cNvPr id="23" name="Text 21"/>
-          <p:cNvSpPr/>
-          <p:nvPr/>
-        </p:nvSpPr>
-        <p:spPr>
-          <a:xfrm>
-            <a:off x="868680" y="5276088"/>
-            <a:ext cx="1325880" cy="384048"/>
-          </a:xfrm>
-          <a:prstGeom prst="rect">
-            <a:avLst/>
-          </a:prstGeom>
-          <a:noFill/>
-          <a:ln/>
-        </p:spPr>
-        <p:txBody>
-          <a:bodyPr wrap="square" lIns="0" tIns="0" rIns="0" bIns="0" rtlCol="0" anchor="ctr"/>
-          <a:lstStyle/>
-          <a:p>
-            <a:pPr algn="ctr" indent="0" marL="0">
-              <a:buNone/>
-            </a:pPr>
-            <a:r>
-              <a:rPr lang="en-US" sz="1200" b="1" dirty="0">
-                <a:solidFill>
-                  <a:srgbClr val="FFFFFF"/>
-                </a:solidFill>
-                <a:latin typeface="Calibri" pitchFamily="34" charset="0"/>
-                <a:ea typeface="Calibri" pitchFamily="34" charset="-122"/>
-                <a:cs typeface="Calibri" pitchFamily="34" charset="-120"/>
-              </a:rPr>
-              <a:t>Priority</a:t>
-            </a:r>
-            <a:endParaRPr lang="en-US" sz="1200" dirty="0"/>
-          </a:p>
-        </p:txBody>
-      </p:sp>
-      <p:sp>
-        <p:nvSpPr>
-          <p:cNvPr id="24" name="Text 22"/>
-          <p:cNvSpPr/>
-          <p:nvPr/>
-        </p:nvSpPr>
-        <p:spPr>
-          <a:xfrm>
-            <a:off x="2423160" y="5202936"/>
-            <a:ext cx="1600200" cy="548640"/>
-          </a:xfrm>
-          <a:prstGeom prst="rect">
-            <a:avLst/>
-          </a:prstGeom>
-          <a:noFill/>
-          <a:ln/>
-        </p:spPr>
-        <p:txBody>
-          <a:bodyPr wrap="square" lIns="0" tIns="0" rIns="0" bIns="0" rtlCol="0" anchor="ctr"/>
-          <a:lstStyle/>
-          <a:p>
-            <a:pPr indent="0" marL="0">
-              <a:lnSpc>
-                <a:spcPts val="1500"/>
-              </a:lnSpc>
-              <a:buNone/>
-            </a:pPr>
-            <a:r>
-              <a:rPr lang="en-US" sz="1300" b="1" dirty="0">
-                <a:solidFill>
-                  <a:srgbClr val="0E3D4E"/>
-                </a:solidFill>
-                <a:latin typeface="Calibri" pitchFamily="34" charset="0"/>
-                <a:ea typeface="Calibri" pitchFamily="34" charset="-122"/>
-                <a:cs typeface="Calibri" pitchFamily="34" charset="-120"/>
-              </a:rPr>
-              <a:t>Un backup nominatif réservé</a:t>
-            </a:r>
-            <a:endParaRPr lang="en-US" sz="1300" dirty="0"/>
-          </a:p>
-        </p:txBody>
-      </p:sp>
-      <p:sp>
-        <p:nvSpPr>
-          <p:cNvPr id="25" name="Text 23"/>
-          <p:cNvSpPr/>
-          <p:nvPr/>
-        </p:nvSpPr>
-        <p:spPr>
-          <a:xfrm>
-            <a:off x="4206240" y="5148072"/>
-            <a:ext cx="3017520" cy="685800"/>
-          </a:xfrm>
-          <a:prstGeom prst="rect">
-            <a:avLst/>
-          </a:prstGeom>
-          <a:noFill/>
-          <a:ln/>
-        </p:spPr>
-        <p:txBody>
-          <a:bodyPr wrap="square" lIns="0" tIns="0" rIns="0" bIns="0" rtlCol="0" anchor="ctr"/>
-          <a:lstStyle/>
-          <a:p>
-            <a:pPr indent="0" marL="0">
-              <a:lnSpc>
-                <a:spcPts val="1400"/>
-              </a:lnSpc>
-              <a:buNone/>
-            </a:pPr>
-            <a:r>
-              <a:rPr lang="en-US" sz="1150" dirty="0">
-                <a:solidFill>
-                  <a:srgbClr val="32424C"/>
-                </a:solidFill>
-                <a:latin typeface="Calibri" pitchFamily="34" charset="0"/>
-                <a:ea typeface="Calibri" pitchFamily="34" charset="-122"/>
-                <a:cs typeface="Calibri" pitchFamily="34" charset="-120"/>
-              </a:rPr>
-              <a:t>La capacité reste inchangée : zéro rupture, dès 1 agent.</a:t>
-            </a:r>
-            <a:endParaRPr lang="en-US" sz="1150" dirty="0"/>
-          </a:p>
-        </p:txBody>
-      </p:sp>
-      <p:sp>
-        <p:nvSpPr>
-          <p:cNvPr id="26" name="Text 24"/>
-          <p:cNvSpPr/>
-          <p:nvPr/>
-        </p:nvSpPr>
-        <p:spPr>
-          <a:xfrm>
-            <a:off x="7406640" y="5148072"/>
-            <a:ext cx="3566160" cy="685800"/>
-          </a:xfrm>
-          <a:prstGeom prst="rect">
-            <a:avLst/>
-          </a:prstGeom>
-          <a:noFill/>
-          <a:ln/>
-        </p:spPr>
-        <p:txBody>
-          <a:bodyPr wrap="square" lIns="0" tIns="0" rIns="0" bIns="0" rtlCol="0" anchor="ctr"/>
-          <a:lstStyle/>
-          <a:p>
-            <a:pPr indent="0" marL="0">
-              <a:lnSpc>
-                <a:spcPts val="1400"/>
-              </a:lnSpc>
-              <a:buNone/>
-            </a:pPr>
-            <a:r>
-              <a:rPr lang="en-US" sz="1150" i="1" dirty="0">
-                <a:solidFill>
-                  <a:srgbClr val="6E7A82"/>
-                </a:solidFill>
-                <a:latin typeface="Calibri" pitchFamily="34" charset="0"/>
-                <a:ea typeface="Calibri" pitchFamily="34" charset="-122"/>
-                <a:cs typeface="Calibri" pitchFamily="34" charset="-120"/>
-              </a:rPr>
-              <a:t>Option de niveau de service, cumulable avec le Poste dédié — pas un quatrième forfait.</a:t>
-            </a:r>
-            <a:endParaRPr lang="en-US" sz="1150" dirty="0"/>
-          </a:p>
-        </p:txBody>
-      </p:sp>
-      <p:sp>
-        <p:nvSpPr>
-          <p:cNvPr id="27" name="Text 25"/>
+          <p:cNvPr id="21" name="Text 19"/>
           <p:cNvSpPr/>
           <p:nvPr/>
         </p:nvSpPr>
@@ -7072,7 +6851,7 @@
                 <a:ea typeface="Calibri" pitchFamily="34" charset="-122"/>
                 <a:cs typeface="Calibri" pitchFamily="34" charset="-120"/>
               </a:rPr>
-              <a:t>Le bon réflexe : rester au Poste dédié, et n'ajouter Priority que si une rupture est réellement inacceptable.</a:t>
+              <a:t>Le bon réflexe : rester au Poste dédié, et ne passer à l'Équipe managée que si la plage à tenir dépasse une journée de travail.</a:t>
             </a:r>
             <a:endParaRPr lang="en-US" sz="1150" dirty="0"/>
           </a:p>

--- a/04-Closing/PLAQUETTE-DEDIE-VS-NONSTOP.pptx
+++ b/04-Closing/PLAQUETTE-DEDIE-VS-NONSTOP.pptx
@@ -5914,11 +5914,11 @@
         <p:spPr>
           <a:xfrm>
             <a:off x="640080" y="2514600"/>
-            <a:ext cx="10881360" cy="1078992"/>
+            <a:ext cx="10881360" cy="1632204"/>
           </a:xfrm>
           <a:prstGeom prst="roundRect">
             <a:avLst>
-              <a:gd name="adj" fmla="val 10169"/>
+              <a:gd name="adj" fmla="val 6723"/>
             </a:avLst>
           </a:prstGeom>
           <a:solidFill>
@@ -5947,7 +5947,7 @@
         </p:nvSpPr>
         <p:spPr>
           <a:xfrm>
-            <a:off x="868680" y="2862072"/>
+            <a:off x="868680" y="3138678"/>
             <a:ext cx="1325880" cy="384048"/>
           </a:xfrm>
           <a:prstGeom prst="roundRect">
@@ -5969,7 +5969,7 @@
         </p:nvSpPr>
         <p:spPr>
           <a:xfrm>
-            <a:off x="868680" y="2862072"/>
+            <a:off x="868680" y="3138678"/>
             <a:ext cx="1325880" cy="384048"/>
           </a:xfrm>
           <a:prstGeom prst="rect">
@@ -6008,8 +6008,8 @@
         </p:nvSpPr>
         <p:spPr>
           <a:xfrm>
-            <a:off x="2423160" y="2788920"/>
-            <a:ext cx="1600200" cy="548640"/>
+            <a:off x="2423160" y="2651760"/>
+            <a:ext cx="1600200" cy="1357884"/>
           </a:xfrm>
           <a:prstGeom prst="rect">
             <a:avLst/>
@@ -6050,8 +6050,8 @@
         </p:nvSpPr>
         <p:spPr>
           <a:xfrm>
-            <a:off x="4206240" y="2734056"/>
-            <a:ext cx="3017520" cy="685800"/>
+            <a:off x="4206240" y="2651760"/>
+            <a:ext cx="3017520" cy="1357884"/>
           </a:xfrm>
           <a:prstGeom prst="rect">
             <a:avLst/>
@@ -6092,8 +6092,8 @@
         </p:nvSpPr>
         <p:spPr>
           <a:xfrm>
-            <a:off x="7406640" y="2734056"/>
-            <a:ext cx="3566160" cy="685800"/>
+            <a:off x="7406640" y="2651760"/>
+            <a:ext cx="3566160" cy="1357884"/>
           </a:xfrm>
           <a:prstGeom prst="rect">
             <a:avLst/>
@@ -6134,12 +6134,12 @@
         </p:nvSpPr>
         <p:spPr>
           <a:xfrm>
-            <a:off x="640080" y="3721608"/>
-            <a:ext cx="10881360" cy="1078992"/>
+            <a:off x="640080" y="4311396"/>
+            <a:ext cx="10881360" cy="1632204"/>
           </a:xfrm>
           <a:prstGeom prst="roundRect">
             <a:avLst>
-              <a:gd name="adj" fmla="val 10169"/>
+              <a:gd name="adj" fmla="val 6723"/>
             </a:avLst>
           </a:prstGeom>
           <a:solidFill>
@@ -6168,7 +6168,7 @@
         </p:nvSpPr>
         <p:spPr>
           <a:xfrm>
-            <a:off x="868680" y="4069080"/>
+            <a:off x="868680" y="4935474"/>
             <a:ext cx="1325880" cy="384048"/>
           </a:xfrm>
           <a:prstGeom prst="roundRect">
@@ -6190,7 +6190,7 @@
         </p:nvSpPr>
         <p:spPr>
           <a:xfrm>
-            <a:off x="868680" y="4069080"/>
+            <a:off x="868680" y="4935474"/>
             <a:ext cx="1325880" cy="384048"/>
           </a:xfrm>
           <a:prstGeom prst="rect">
@@ -6229,8 +6229,8 @@
         </p:nvSpPr>
         <p:spPr>
           <a:xfrm>
-            <a:off x="2423160" y="3995928"/>
-            <a:ext cx="1600200" cy="548640"/>
+            <a:off x="2423160" y="4448556"/>
+            <a:ext cx="1600200" cy="1357884"/>
           </a:xfrm>
           <a:prstGeom prst="rect">
             <a:avLst/>
@@ -6271,8 +6271,8 @@
         </p:nvSpPr>
         <p:spPr>
           <a:xfrm>
-            <a:off x="4206240" y="3941064"/>
-            <a:ext cx="3017520" cy="685800"/>
+            <a:off x="4206240" y="4448556"/>
+            <a:ext cx="3017520" cy="1357884"/>
           </a:xfrm>
           <a:prstGeom prst="rect">
             <a:avLst/>
@@ -6313,8 +6313,8 @@
         </p:nvSpPr>
         <p:spPr>
           <a:xfrm>
-            <a:off x="7406640" y="3941064"/>
-            <a:ext cx="3566160" cy="685800"/>
+            <a:off x="7406640" y="4448556"/>
+            <a:ext cx="3566160" cy="1357884"/>
           </a:xfrm>
           <a:prstGeom prst="rect">
             <a:avLst/>

--- a/04-Closing/PLAQUETTE-DEDIE-VS-NONSTOP.pptx
+++ b/04-Closing/PLAQUETTE-DEDIE-VS-NONSTOP.pptx
@@ -1139,7 +1139,7 @@
           <a:p>
             <a:r>
               <a:rPr lang="en-US" dirty="0"/>
-              <a:t>Le 4e critère est le verrou : sous 4 positions, on ne vend pas l'Équipe managée, même si le client le demande. Ce n'est pas un choix commercial, c'est une contrainte de staffing.</a:t>
+              <a:t>Le 4e critere est le verrou : sous 4 AGENTS en rotation, on ne vend pas l'Equipe managee, meme si le client le demande. Le plancher compte des tetes (4 x 35 h = 140 h a repartir), pas des positions simultanees. Ce n'est pas un choix commercial, c'est une contrainte de staffing.</a:t>
             </a:r>
             <a:endParaRPr lang="en-US" dirty="0"/>
           </a:p>
@@ -2842,7 +2842,7 @@
                 <a:ea typeface="Calibri" pitchFamily="34" charset="-122"/>
                 <a:cs typeface="Calibri" pitchFamily="34" charset="-120"/>
               </a:rPr>
-              <a:t>4 agents minimum en rotation sur 6h-20h, 3×8 ou 24·7, plus un superviseur dédié.</a:t>
+              <a:t>4 agents minimum en rotation sur 6h-20h, plus un superviseur dédié (3×8 et 24·7 : sur devis).</a:t>
             </a:r>
             <a:endParaRPr lang="en-US" sz="1300" dirty="0"/>
           </a:p>
@@ -3953,7 +3953,7 @@
                 <a:ea typeface="Calibri" pitchFamily="34" charset="-122"/>
                 <a:cs typeface="Calibri" pitchFamily="34" charset="-120"/>
               </a:rPr>
-              <a:t>sur une plage classique : c'est le forfait qui porte l'écart de −40 à −60 % face à un poste interne en France.</a:t>
+              <a:t>sur une plage classique : c'est le forfait qui porte l'écart, jusqu'à −50 % face à un poste interne en France.</a:t>
             </a:r>
             <a:endParaRPr lang="en-US" sz="1150" dirty="0"/>
           </a:p>
@@ -4873,7 +4873,7 @@
                 <a:ea typeface="Calibri" pitchFamily="34" charset="-122"/>
                 <a:cs typeface="Calibri" pitchFamily="34" charset="-120"/>
               </a:rPr>
-              <a:t>6h-20h, 3×8 ou 24·7 : au-delà d'une journée de travail, il faut des équipes qui se relaient, pas des agents qui s'épuisent.</a:t>
+              <a:t>6h-20h au tarif affiché, 3×8 et 24·7 sur devis : au-delà d'une journée de travail, il faut des équipes qui se relaient, pas des agents qui s'épuisent.</a:t>
             </a:r>
             <a:endParaRPr lang="en-US" sz="1150" dirty="0"/>
           </a:p>
@@ -4998,7 +4998,7 @@
                 <a:ea typeface="Calibri" pitchFamily="34" charset="-122"/>
                 <a:cs typeface="Calibri" pitchFamily="34" charset="-120"/>
               </a:rPr>
-              <a:t>Vous ouvrez 4 positions ou plus</a:t>
+              <a:t>Vous mobilisez 4 agents ou plus</a:t>
             </a:r>
             <a:endParaRPr lang="en-US" sz="1400" dirty="0"/>
           </a:p>
@@ -5040,7 +5040,7 @@
                 <a:ea typeface="Calibri" pitchFamily="34" charset="-122"/>
                 <a:cs typeface="Calibri" pitchFamily="34" charset="-120"/>
               </a:rPr>
-              <a:t>C'est le plancher physique de la rotation : 4 × 35 h = 140 h/semaine pour 70 h d'amplitude. En dessous, elle ne tourne pas.</a:t>
+              <a:t>C'est le plancher physique de la rotation : 4 × 35 h = 140 h/semaine pour 70 h d'amplitude, soit ~2 agents présents à la fois. En dessous, elle ne tourne pas.</a:t>
             </a:r>
             <a:endParaRPr lang="en-US" sz="1150" dirty="0"/>
           </a:p>
@@ -5182,7 +5182,7 @@
                 <a:ea typeface="Calibri" pitchFamily="34" charset="-122"/>
                 <a:cs typeface="Calibri" pitchFamily="34" charset="-120"/>
               </a:rPr>
-              <a:t>Un seul de ces cinq critères suffit à justifier l'Équipe managée, dès lors qu'il touche les heures — sauf le plancher de 4 positions, qui, lui, est non négociable.</a:t>
+              <a:t>Un seul de ces cinq critères suffit à justifier l'Équipe managée, dès lors qu'il touche les heures — sauf le plancher de 4 agents en rotation, qui, lui, est non négociable.</a:t>
             </a:r>
             <a:endParaRPr lang="en-US" sz="1200" dirty="0"/>
           </a:p>
@@ -5562,7 +5562,7 @@
                 <a:ea typeface="Calibri" pitchFamily="34" charset="-122"/>
                 <a:cs typeface="Calibri" pitchFamily="34" charset="-120"/>
               </a:rPr>
-              <a:t>Tenir 60 h/semaine avec 4 positions en simultané demande 5,3 têtes en dédié. L'Équipe managée couvre la même plage avec 4 agents — donc ~2,3 en ligne à la fois. Moins cher pour cette raison, pas par efficacité.</a:t>
+              <a:t>Tenir 60 h/semaine avec 4 positions en simultané demande 6,9 têtes en dédié. L'Équipe managée couvre la même plage avec 4 agents — donc ~2,3 en ligne à la fois. Moins cher pour cette raison, pas par efficacité.</a:t>
             </a:r>
             <a:endParaRPr lang="en-US" sz="1050" dirty="0"/>
           </a:p>
@@ -7369,7 +7369,7 @@
                 <a:ea typeface="Calibri" pitchFamily="34" charset="-122"/>
                 <a:cs typeface="Calibri" pitchFamily="34" charset="-120"/>
               </a:rPr>
-              <a:t>Il faut 5,3 têtes pour tenir 4 positions en simultané — et la plage tombe dès la première absence, précisément le jour où le SLA se joue.</a:t>
+              <a:t>Il faut 6,9 têtes pour tenir 4 positions en simultané — et la plage tombe dès la première absence, précisément le jour où le SLA se joue.</a:t>
             </a:r>
             <a:endParaRPr lang="en-US" sz="1200" dirty="0"/>
           </a:p>
@@ -7629,7 +7629,7 @@
                 <a:ea typeface="Calibri" pitchFamily="34" charset="-122"/>
                 <a:cs typeface="Calibri" pitchFamily="34" charset="-120"/>
               </a:rPr>
-              <a:t>Tant que vos demandes arrivent entre 9h et 18h, le Poste dédié les couvre au meilleur prix. Dès qu'elles arrivent après 18h, le week-end ou la nuit — et que vous avez 4 positions à ouvrir — l'Équipe managée les couvre pour moins cher que des postes dédiés empilés.</a:t>
+              <a:t>Tant que vos demandes arrivent entre 9h et 18h, le Poste dédié les couvre au meilleur prix. Dès qu'elles arrivent après 18h, le week-end ou la nuit — et que vous mobilisez 4 agents ou plus — l'Équipe managée les couvre pour moins cher que des postes dédiés empilés.</a:t>
             </a:r>
             <a:endParaRPr lang="en-US" sz="1500" dirty="0"/>
           </a:p>
